--- a/RAG_Solution_Presentation.pptx
+++ b/RAG_Solution_Presentation.pptx
@@ -5,18 +5,18 @@
     <p:sldMasterId id="2147483648" r:id="rId1"/>
   </p:sldMasterIdLst>
   <p:sldIdLst>
-    <p:sldId id="256" r:id="rId7"/>
-    <p:sldId id="257" r:id="rId8"/>
-    <p:sldId id="258" r:id="rId9"/>
-    <p:sldId id="259" r:id="rId10"/>
-    <p:sldId id="260" r:id="rId11"/>
-    <p:sldId id="261" r:id="rId12"/>
-    <p:sldId id="262" r:id="rId13"/>
-    <p:sldId id="263" r:id="rId14"/>
-    <p:sldId id="264" r:id="rId15"/>
-    <p:sldId id="265" r:id="rId16"/>
-    <p:sldId id="266" r:id="rId17"/>
-    <p:sldId id="267" r:id="rId18"/>
+    <p:sldId id="256" r:id="rId2"/>
+    <p:sldId id="257" r:id="rId3"/>
+    <p:sldId id="258" r:id="rId4"/>
+    <p:sldId id="259" r:id="rId5"/>
+    <p:sldId id="260" r:id="rId6"/>
+    <p:sldId id="261" r:id="rId7"/>
+    <p:sldId id="262" r:id="rId8"/>
+    <p:sldId id="263" r:id="rId9"/>
+    <p:sldId id="264" r:id="rId10"/>
+    <p:sldId id="265" r:id="rId11"/>
+    <p:sldId id="266" r:id="rId12"/>
+    <p:sldId id="267" r:id="rId13"/>
   </p:sldIdLst>
   <p:sldSz cx="9144000" cy="6858000" type="screen4x3"/>
   <p:notesSz cx="6858000" cy="9144000"/>
@@ -115,6 +115,22 @@
       </a:defRPr>
     </a:lvl9pPr>
   </p:defaultTextStyle>
+  <p:extLst>
+    <p:ext uri="{EFAFB233-063F-42B5-8137-9DF3F51BA10A}">
+      <p15:sldGuideLst xmlns:p15="http://schemas.microsoft.com/office/powerpoint/2012/main">
+        <p15:guide id="1" orient="horz" pos="2160">
+          <p15:clr>
+            <a:srgbClr val="A4A3A4"/>
+          </p15:clr>
+        </p15:guide>
+        <p15:guide id="2" pos="2880">
+          <p15:clr>
+            <a:srgbClr val="A4A3A4"/>
+          </p15:clr>
+        </p15:guide>
+      </p15:sldGuideLst>
+    </p:ext>
+  </p:extLst>
 </p:presentation>
 </file>
 
@@ -156,10 +172,9 @@
           <a:lstStyle/>
           <a:p>
             <a:r>
-              <a:rPr lang="en-US" smtClean="0"/>
+              <a:rPr lang="en-US"/>
               <a:t>Click to edit Master title style</a:t>
             </a:r>
-            <a:endParaRPr lang="en-US"/>
           </a:p>
         </p:txBody>
       </p:sp>
@@ -275,10 +290,9 @@
           </a:lstStyle>
           <a:p>
             <a:r>
-              <a:rPr lang="en-US" smtClean="0"/>
+              <a:rPr lang="en-US"/>
               <a:t>Click to edit Master subtitle style</a:t>
             </a:r>
-            <a:endParaRPr lang="en-US"/>
           </a:p>
         </p:txBody>
       </p:sp>
@@ -299,7 +313,7 @@
           <a:p>
             <a:fld id="{5BCAD085-E8A6-8845-BD4E-CB4CCA059FC4}" type="datetimeFigureOut">
               <a:rPr lang="en-US" smtClean="0"/>
-              <a:t>1/27/13</a:t>
+              <a:t>3/27/2026</a:t>
             </a:fld>
             <a:endParaRPr lang="en-US"/>
           </a:p>
@@ -393,10 +407,9 @@
           <a:lstStyle/>
           <a:p>
             <a:r>
-              <a:rPr lang="en-US" smtClean="0"/>
+              <a:rPr lang="en-US"/>
               <a:t>Click to edit Master title style</a:t>
             </a:r>
-            <a:endParaRPr lang="en-US"/>
           </a:p>
         </p:txBody>
       </p:sp>
@@ -417,38 +430,37 @@
           <a:p>
             <a:pPr lvl="0"/>
             <a:r>
-              <a:rPr lang="en-US" smtClean="0"/>
+              <a:rPr lang="en-US"/>
               <a:t>Click to edit Master text styles</a:t>
             </a:r>
           </a:p>
           <a:p>
             <a:pPr lvl="1"/>
             <a:r>
-              <a:rPr lang="en-US" smtClean="0"/>
+              <a:rPr lang="en-US"/>
               <a:t>Second level</a:t>
             </a:r>
           </a:p>
           <a:p>
             <a:pPr lvl="2"/>
             <a:r>
-              <a:rPr lang="en-US" smtClean="0"/>
+              <a:rPr lang="en-US"/>
               <a:t>Third level</a:t>
             </a:r>
           </a:p>
           <a:p>
             <a:pPr lvl="3"/>
             <a:r>
-              <a:rPr lang="en-US" smtClean="0"/>
+              <a:rPr lang="en-US"/>
               <a:t>Fourth level</a:t>
             </a:r>
           </a:p>
           <a:p>
             <a:pPr lvl="4"/>
             <a:r>
-              <a:rPr lang="en-US" smtClean="0"/>
+              <a:rPr lang="en-US"/>
               <a:t>Fifth level</a:t>
             </a:r>
-            <a:endParaRPr lang="en-US"/>
           </a:p>
         </p:txBody>
       </p:sp>
@@ -469,7 +481,7 @@
           <a:p>
             <a:fld id="{5BCAD085-E8A6-8845-BD4E-CB4CCA059FC4}" type="datetimeFigureOut">
               <a:rPr lang="en-US" smtClean="0"/>
-              <a:t>1/27/13</a:t>
+              <a:t>3/27/2026</a:t>
             </a:fld>
             <a:endParaRPr lang="en-US"/>
           </a:p>
@@ -568,10 +580,9 @@
           <a:lstStyle/>
           <a:p>
             <a:r>
-              <a:rPr lang="en-US" smtClean="0"/>
+              <a:rPr lang="en-US"/>
               <a:t>Click to edit Master title style</a:t>
             </a:r>
-            <a:endParaRPr lang="en-US"/>
           </a:p>
         </p:txBody>
       </p:sp>
@@ -597,38 +608,37 @@
           <a:p>
             <a:pPr lvl="0"/>
             <a:r>
-              <a:rPr lang="en-US" smtClean="0"/>
+              <a:rPr lang="en-US"/>
               <a:t>Click to edit Master text styles</a:t>
             </a:r>
           </a:p>
           <a:p>
             <a:pPr lvl="1"/>
             <a:r>
-              <a:rPr lang="en-US" smtClean="0"/>
+              <a:rPr lang="en-US"/>
               <a:t>Second level</a:t>
             </a:r>
           </a:p>
           <a:p>
             <a:pPr lvl="2"/>
             <a:r>
-              <a:rPr lang="en-US" smtClean="0"/>
+              <a:rPr lang="en-US"/>
               <a:t>Third level</a:t>
             </a:r>
           </a:p>
           <a:p>
             <a:pPr lvl="3"/>
             <a:r>
-              <a:rPr lang="en-US" smtClean="0"/>
+              <a:rPr lang="en-US"/>
               <a:t>Fourth level</a:t>
             </a:r>
           </a:p>
           <a:p>
             <a:pPr lvl="4"/>
             <a:r>
-              <a:rPr lang="en-US" smtClean="0"/>
+              <a:rPr lang="en-US"/>
               <a:t>Fifth level</a:t>
             </a:r>
-            <a:endParaRPr lang="en-US"/>
           </a:p>
         </p:txBody>
       </p:sp>
@@ -649,7 +659,7 @@
           <a:p>
             <a:fld id="{5BCAD085-E8A6-8845-BD4E-CB4CCA059FC4}" type="datetimeFigureOut">
               <a:rPr lang="en-US" smtClean="0"/>
-              <a:t>1/27/13</a:t>
+              <a:t>3/27/2026</a:t>
             </a:fld>
             <a:endParaRPr lang="en-US"/>
           </a:p>
@@ -743,10 +753,9 @@
           <a:lstStyle/>
           <a:p>
             <a:r>
-              <a:rPr lang="en-US" smtClean="0"/>
+              <a:rPr lang="en-US"/>
               <a:t>Click to edit Master title style</a:t>
             </a:r>
-            <a:endParaRPr lang="en-US"/>
           </a:p>
         </p:txBody>
       </p:sp>
@@ -767,38 +776,37 @@
           <a:p>
             <a:pPr lvl="0"/>
             <a:r>
-              <a:rPr lang="en-US" smtClean="0"/>
+              <a:rPr lang="en-US"/>
               <a:t>Click to edit Master text styles</a:t>
             </a:r>
           </a:p>
           <a:p>
             <a:pPr lvl="1"/>
             <a:r>
-              <a:rPr lang="en-US" smtClean="0"/>
+              <a:rPr lang="en-US"/>
               <a:t>Second level</a:t>
             </a:r>
           </a:p>
           <a:p>
             <a:pPr lvl="2"/>
             <a:r>
-              <a:rPr lang="en-US" smtClean="0"/>
+              <a:rPr lang="en-US"/>
               <a:t>Third level</a:t>
             </a:r>
           </a:p>
           <a:p>
             <a:pPr lvl="3"/>
             <a:r>
-              <a:rPr lang="en-US" smtClean="0"/>
+              <a:rPr lang="en-US"/>
               <a:t>Fourth level</a:t>
             </a:r>
           </a:p>
           <a:p>
             <a:pPr lvl="4"/>
             <a:r>
-              <a:rPr lang="en-US" smtClean="0"/>
+              <a:rPr lang="en-US"/>
               <a:t>Fifth level</a:t>
             </a:r>
-            <a:endParaRPr lang="en-US"/>
           </a:p>
         </p:txBody>
       </p:sp>
@@ -819,7 +827,7 @@
           <a:p>
             <a:fld id="{5BCAD085-E8A6-8845-BD4E-CB4CCA059FC4}" type="datetimeFigureOut">
               <a:rPr lang="en-US" smtClean="0"/>
-              <a:t>1/27/13</a:t>
+              <a:t>3/27/2026</a:t>
             </a:fld>
             <a:endParaRPr lang="en-US"/>
           </a:p>
@@ -922,10 +930,9 @@
           </a:lstStyle>
           <a:p>
             <a:r>
-              <a:rPr lang="en-US" smtClean="0"/>
+              <a:rPr lang="en-US"/>
               <a:t>Click to edit Master title style</a:t>
             </a:r>
-            <a:endParaRPr lang="en-US"/>
           </a:p>
         </p:txBody>
       </p:sp>
@@ -1042,7 +1049,7 @@
           <a:p>
             <a:pPr lvl="0"/>
             <a:r>
-              <a:rPr lang="en-US" smtClean="0"/>
+              <a:rPr lang="en-US"/>
               <a:t>Click to edit Master text styles</a:t>
             </a:r>
           </a:p>
@@ -1065,7 +1072,7 @@
           <a:p>
             <a:fld id="{5BCAD085-E8A6-8845-BD4E-CB4CCA059FC4}" type="datetimeFigureOut">
               <a:rPr lang="en-US" smtClean="0"/>
-              <a:t>1/27/13</a:t>
+              <a:t>3/27/2026</a:t>
             </a:fld>
             <a:endParaRPr lang="en-US"/>
           </a:p>
@@ -1159,10 +1166,9 @@
           <a:lstStyle/>
           <a:p>
             <a:r>
-              <a:rPr lang="en-US" smtClean="0"/>
+              <a:rPr lang="en-US"/>
               <a:t>Click to edit Master title style</a:t>
             </a:r>
-            <a:endParaRPr lang="en-US"/>
           </a:p>
         </p:txBody>
       </p:sp>
@@ -1216,38 +1222,37 @@
           <a:p>
             <a:pPr lvl="0"/>
             <a:r>
-              <a:rPr lang="en-US" smtClean="0"/>
+              <a:rPr lang="en-US"/>
               <a:t>Click to edit Master text styles</a:t>
             </a:r>
           </a:p>
           <a:p>
             <a:pPr lvl="1"/>
             <a:r>
-              <a:rPr lang="en-US" smtClean="0"/>
+              <a:rPr lang="en-US"/>
               <a:t>Second level</a:t>
             </a:r>
           </a:p>
           <a:p>
             <a:pPr lvl="2"/>
             <a:r>
-              <a:rPr lang="en-US" smtClean="0"/>
+              <a:rPr lang="en-US"/>
               <a:t>Third level</a:t>
             </a:r>
           </a:p>
           <a:p>
             <a:pPr lvl="3"/>
             <a:r>
-              <a:rPr lang="en-US" smtClean="0"/>
+              <a:rPr lang="en-US"/>
               <a:t>Fourth level</a:t>
             </a:r>
           </a:p>
           <a:p>
             <a:pPr lvl="4"/>
             <a:r>
-              <a:rPr lang="en-US" smtClean="0"/>
+              <a:rPr lang="en-US"/>
               <a:t>Fifth level</a:t>
             </a:r>
-            <a:endParaRPr lang="en-US"/>
           </a:p>
         </p:txBody>
       </p:sp>
@@ -1301,38 +1306,37 @@
           <a:p>
             <a:pPr lvl="0"/>
             <a:r>
-              <a:rPr lang="en-US" smtClean="0"/>
+              <a:rPr lang="en-US"/>
               <a:t>Click to edit Master text styles</a:t>
             </a:r>
           </a:p>
           <a:p>
             <a:pPr lvl="1"/>
             <a:r>
-              <a:rPr lang="en-US" smtClean="0"/>
+              <a:rPr lang="en-US"/>
               <a:t>Second level</a:t>
             </a:r>
           </a:p>
           <a:p>
             <a:pPr lvl="2"/>
             <a:r>
-              <a:rPr lang="en-US" smtClean="0"/>
+              <a:rPr lang="en-US"/>
               <a:t>Third level</a:t>
             </a:r>
           </a:p>
           <a:p>
             <a:pPr lvl="3"/>
             <a:r>
-              <a:rPr lang="en-US" smtClean="0"/>
+              <a:rPr lang="en-US"/>
               <a:t>Fourth level</a:t>
             </a:r>
           </a:p>
           <a:p>
             <a:pPr lvl="4"/>
             <a:r>
-              <a:rPr lang="en-US" smtClean="0"/>
+              <a:rPr lang="en-US"/>
               <a:t>Fifth level</a:t>
             </a:r>
-            <a:endParaRPr lang="en-US"/>
           </a:p>
         </p:txBody>
       </p:sp>
@@ -1353,7 +1357,7 @@
           <a:p>
             <a:fld id="{5BCAD085-E8A6-8845-BD4E-CB4CCA059FC4}" type="datetimeFigureOut">
               <a:rPr lang="en-US" smtClean="0"/>
-              <a:t>1/27/13</a:t>
+              <a:t>3/27/2026</a:t>
             </a:fld>
             <a:endParaRPr lang="en-US"/>
           </a:p>
@@ -1451,10 +1455,9 @@
           </a:lstStyle>
           <a:p>
             <a:r>
-              <a:rPr lang="en-US" smtClean="0"/>
+              <a:rPr lang="en-US"/>
               <a:t>Click to edit Master title style</a:t>
             </a:r>
-            <a:endParaRPr lang="en-US"/>
           </a:p>
         </p:txBody>
       </p:sp>
@@ -1517,7 +1520,7 @@
           <a:p>
             <a:pPr lvl="0"/>
             <a:r>
-              <a:rPr lang="en-US" smtClean="0"/>
+              <a:rPr lang="en-US"/>
               <a:t>Click to edit Master text styles</a:t>
             </a:r>
           </a:p>
@@ -1573,38 +1576,37 @@
           <a:p>
             <a:pPr lvl="0"/>
             <a:r>
-              <a:rPr lang="en-US" smtClean="0"/>
+              <a:rPr lang="en-US"/>
               <a:t>Click to edit Master text styles</a:t>
             </a:r>
           </a:p>
           <a:p>
             <a:pPr lvl="1"/>
             <a:r>
-              <a:rPr lang="en-US" smtClean="0"/>
+              <a:rPr lang="en-US"/>
               <a:t>Second level</a:t>
             </a:r>
           </a:p>
           <a:p>
             <a:pPr lvl="2"/>
             <a:r>
-              <a:rPr lang="en-US" smtClean="0"/>
+              <a:rPr lang="en-US"/>
               <a:t>Third level</a:t>
             </a:r>
           </a:p>
           <a:p>
             <a:pPr lvl="3"/>
             <a:r>
-              <a:rPr lang="en-US" smtClean="0"/>
+              <a:rPr lang="en-US"/>
               <a:t>Fourth level</a:t>
             </a:r>
           </a:p>
           <a:p>
             <a:pPr lvl="4"/>
             <a:r>
-              <a:rPr lang="en-US" smtClean="0"/>
+              <a:rPr lang="en-US"/>
               <a:t>Fifth level</a:t>
             </a:r>
-            <a:endParaRPr lang="en-US"/>
           </a:p>
         </p:txBody>
       </p:sp>
@@ -1667,7 +1669,7 @@
           <a:p>
             <a:pPr lvl="0"/>
             <a:r>
-              <a:rPr lang="en-US" smtClean="0"/>
+              <a:rPr lang="en-US"/>
               <a:t>Click to edit Master text styles</a:t>
             </a:r>
           </a:p>
@@ -1723,38 +1725,37 @@
           <a:p>
             <a:pPr lvl="0"/>
             <a:r>
-              <a:rPr lang="en-US" smtClean="0"/>
+              <a:rPr lang="en-US"/>
               <a:t>Click to edit Master text styles</a:t>
             </a:r>
           </a:p>
           <a:p>
             <a:pPr lvl="1"/>
             <a:r>
-              <a:rPr lang="en-US" smtClean="0"/>
+              <a:rPr lang="en-US"/>
               <a:t>Second level</a:t>
             </a:r>
           </a:p>
           <a:p>
             <a:pPr lvl="2"/>
             <a:r>
-              <a:rPr lang="en-US" smtClean="0"/>
+              <a:rPr lang="en-US"/>
               <a:t>Third level</a:t>
             </a:r>
           </a:p>
           <a:p>
             <a:pPr lvl="3"/>
             <a:r>
-              <a:rPr lang="en-US" smtClean="0"/>
+              <a:rPr lang="en-US"/>
               <a:t>Fourth level</a:t>
             </a:r>
           </a:p>
           <a:p>
             <a:pPr lvl="4"/>
             <a:r>
-              <a:rPr lang="en-US" smtClean="0"/>
+              <a:rPr lang="en-US"/>
               <a:t>Fifth level</a:t>
             </a:r>
-            <a:endParaRPr lang="en-US"/>
           </a:p>
         </p:txBody>
       </p:sp>
@@ -1775,7 +1776,7 @@
           <a:p>
             <a:fld id="{5BCAD085-E8A6-8845-BD4E-CB4CCA059FC4}" type="datetimeFigureOut">
               <a:rPr lang="en-US" smtClean="0"/>
-              <a:t>1/27/13</a:t>
+              <a:t>3/27/2026</a:t>
             </a:fld>
             <a:endParaRPr lang="en-US"/>
           </a:p>
@@ -1869,10 +1870,9 @@
           <a:lstStyle/>
           <a:p>
             <a:r>
-              <a:rPr lang="en-US" smtClean="0"/>
+              <a:rPr lang="en-US"/>
               <a:t>Click to edit Master title style</a:t>
             </a:r>
-            <a:endParaRPr lang="en-US"/>
           </a:p>
         </p:txBody>
       </p:sp>
@@ -1893,7 +1893,7 @@
           <a:p>
             <a:fld id="{5BCAD085-E8A6-8845-BD4E-CB4CCA059FC4}" type="datetimeFigureOut">
               <a:rPr lang="en-US" smtClean="0"/>
-              <a:t>1/27/13</a:t>
+              <a:t>3/27/2026</a:t>
             </a:fld>
             <a:endParaRPr lang="en-US"/>
           </a:p>
@@ -1988,7 +1988,7 @@
           <a:p>
             <a:fld id="{5BCAD085-E8A6-8845-BD4E-CB4CCA059FC4}" type="datetimeFigureOut">
               <a:rPr lang="en-US" smtClean="0"/>
-              <a:t>1/27/13</a:t>
+              <a:t>3/27/2026</a:t>
             </a:fld>
             <a:endParaRPr lang="en-US"/>
           </a:p>
@@ -2091,10 +2091,9 @@
           </a:lstStyle>
           <a:p>
             <a:r>
-              <a:rPr lang="en-US" smtClean="0"/>
+              <a:rPr lang="en-US"/>
               <a:t>Click to edit Master title style</a:t>
             </a:r>
-            <a:endParaRPr lang="en-US"/>
           </a:p>
         </p:txBody>
       </p:sp>
@@ -2148,38 +2147,37 @@
           <a:p>
             <a:pPr lvl="0"/>
             <a:r>
-              <a:rPr lang="en-US" smtClean="0"/>
+              <a:rPr lang="en-US"/>
               <a:t>Click to edit Master text styles</a:t>
             </a:r>
           </a:p>
           <a:p>
             <a:pPr lvl="1"/>
             <a:r>
-              <a:rPr lang="en-US" smtClean="0"/>
+              <a:rPr lang="en-US"/>
               <a:t>Second level</a:t>
             </a:r>
           </a:p>
           <a:p>
             <a:pPr lvl="2"/>
             <a:r>
-              <a:rPr lang="en-US" smtClean="0"/>
+              <a:rPr lang="en-US"/>
               <a:t>Third level</a:t>
             </a:r>
           </a:p>
           <a:p>
             <a:pPr lvl="3"/>
             <a:r>
-              <a:rPr lang="en-US" smtClean="0"/>
+              <a:rPr lang="en-US"/>
               <a:t>Fourth level</a:t>
             </a:r>
           </a:p>
           <a:p>
             <a:pPr lvl="4"/>
             <a:r>
-              <a:rPr lang="en-US" smtClean="0"/>
+              <a:rPr lang="en-US"/>
               <a:t>Fifth level</a:t>
             </a:r>
-            <a:endParaRPr lang="en-US"/>
           </a:p>
         </p:txBody>
       </p:sp>
@@ -2242,7 +2240,7 @@
           <a:p>
             <a:pPr lvl="0"/>
             <a:r>
-              <a:rPr lang="en-US" smtClean="0"/>
+              <a:rPr lang="en-US"/>
               <a:t>Click to edit Master text styles</a:t>
             </a:r>
           </a:p>
@@ -2265,7 +2263,7 @@
           <a:p>
             <a:fld id="{5BCAD085-E8A6-8845-BD4E-CB4CCA059FC4}" type="datetimeFigureOut">
               <a:rPr lang="en-US" smtClean="0"/>
-              <a:t>1/27/13</a:t>
+              <a:t>3/27/2026</a:t>
             </a:fld>
             <a:endParaRPr lang="en-US"/>
           </a:p>
@@ -2368,10 +2366,9 @@
           </a:lstStyle>
           <a:p>
             <a:r>
-              <a:rPr lang="en-US" smtClean="0"/>
+              <a:rPr lang="en-US"/>
               <a:t>Click to edit Master title style</a:t>
             </a:r>
-            <a:endParaRPr lang="en-US"/>
           </a:p>
         </p:txBody>
       </p:sp>
@@ -2495,7 +2492,7 @@
           <a:p>
             <a:pPr lvl="0"/>
             <a:r>
-              <a:rPr lang="en-US" smtClean="0"/>
+              <a:rPr lang="en-US"/>
               <a:t>Click to edit Master text styles</a:t>
             </a:r>
           </a:p>
@@ -2518,7 +2515,7 @@
           <a:p>
             <a:fld id="{5BCAD085-E8A6-8845-BD4E-CB4CCA059FC4}" type="datetimeFigureOut">
               <a:rPr lang="en-US" smtClean="0"/>
-              <a:t>1/27/13</a:t>
+              <a:t>3/27/2026</a:t>
             </a:fld>
             <a:endParaRPr lang="en-US"/>
           </a:p>
@@ -2627,10 +2624,9 @@
           <a:lstStyle/>
           <a:p>
             <a:r>
-              <a:rPr lang="en-US" smtClean="0"/>
+              <a:rPr lang="en-US"/>
               <a:t>Click to edit Master title style</a:t>
             </a:r>
-            <a:endParaRPr lang="en-US"/>
           </a:p>
         </p:txBody>
       </p:sp>
@@ -2661,38 +2657,37 @@
           <a:p>
             <a:pPr lvl="0"/>
             <a:r>
-              <a:rPr lang="en-US" smtClean="0"/>
+              <a:rPr lang="en-US"/>
               <a:t>Click to edit Master text styles</a:t>
             </a:r>
           </a:p>
           <a:p>
             <a:pPr lvl="1"/>
             <a:r>
-              <a:rPr lang="en-US" smtClean="0"/>
+              <a:rPr lang="en-US"/>
               <a:t>Second level</a:t>
             </a:r>
           </a:p>
           <a:p>
             <a:pPr lvl="2"/>
             <a:r>
-              <a:rPr lang="en-US" smtClean="0"/>
+              <a:rPr lang="en-US"/>
               <a:t>Third level</a:t>
             </a:r>
           </a:p>
           <a:p>
             <a:pPr lvl="3"/>
             <a:r>
-              <a:rPr lang="en-US" smtClean="0"/>
+              <a:rPr lang="en-US"/>
               <a:t>Fourth level</a:t>
             </a:r>
           </a:p>
           <a:p>
             <a:pPr lvl="4"/>
             <a:r>
-              <a:rPr lang="en-US" smtClean="0"/>
+              <a:rPr lang="en-US"/>
               <a:t>Fifth level</a:t>
             </a:r>
-            <a:endParaRPr lang="en-US"/>
           </a:p>
         </p:txBody>
       </p:sp>
@@ -2731,7 +2726,7 @@
           <a:p>
             <a:fld id="{5BCAD085-E8A6-8845-BD4E-CB4CCA059FC4}" type="datetimeFigureOut">
               <a:rPr lang="en-US" smtClean="0"/>
-              <a:t>1/27/13</a:t>
+              <a:t>3/27/2026</a:t>
             </a:fld>
             <a:endParaRPr lang="en-US"/>
           </a:p>
@@ -3090,7 +3085,7 @@
 </file>
 
 <file path=ppt/slides/slide1.xml><?xml version="1.0" encoding="utf-8"?>
-<p:sld xmlns:a="http://schemas.openxmlformats.org/drawingml/2006/main" xmlns:p="http://schemas.openxmlformats.org/presentationml/2006/main" xmlns:r="http://schemas.openxmlformats.org/officeDocument/2006/relationships">
+<p:sld xmlns:a="http://schemas.openxmlformats.org/drawingml/2006/main" xmlns:r="http://schemas.openxmlformats.org/officeDocument/2006/relationships" xmlns:p="http://schemas.openxmlformats.org/presentationml/2006/main">
   <p:cSld>
     <p:spTree>
       <p:nvGrpSpPr>
@@ -3098,7 +3093,14 @@
         <p:cNvGrpSpPr/>
         <p:nvPr/>
       </p:nvGrpSpPr>
-      <p:grpSpPr/>
+      <p:grpSpPr>
+        <a:xfrm>
+          <a:off x="0" y="0"/>
+          <a:ext cx="0" cy="0"/>
+          <a:chOff x="0" y="0"/>
+          <a:chExt cx="0" cy="0"/>
+        </a:xfrm>
+      </p:grpSpPr>
       <p:sp>
         <p:nvSpPr>
           <p:cNvPr id="2" name="Title 1"/>
@@ -3136,13 +3138,13 @@
           <a:lstStyle/>
           <a:p>
             <a:r>
-              <a:t>Retrieval-Augmented Generation System</a:t>
-            </a:r>
-          </a:p>
-          <a:p>
-            <a:r>
-              <a:t>Candidate Submission</a:t>
-            </a:r>
+              <a:rPr dirty="0"/>
+              <a:t>Retrieval-Augmented </a:t>
+            </a:r>
+            <a:r>
+              <a:t>Generation System</a:t>
+            </a:r>
+            <a:endParaRPr dirty="0"/>
           </a:p>
         </p:txBody>
       </p:sp>
@@ -3155,7 +3157,7 @@
 </file>
 
 <file path=ppt/slides/slide10.xml><?xml version="1.0" encoding="utf-8"?>
-<p:sld xmlns:a="http://schemas.openxmlformats.org/drawingml/2006/main" xmlns:p="http://schemas.openxmlformats.org/presentationml/2006/main" xmlns:r="http://schemas.openxmlformats.org/officeDocument/2006/relationships">
+<p:sld xmlns:a="http://schemas.openxmlformats.org/drawingml/2006/main" xmlns:r="http://schemas.openxmlformats.org/officeDocument/2006/relationships" xmlns:p="http://schemas.openxmlformats.org/presentationml/2006/main">
   <p:cSld>
     <p:spTree>
       <p:nvGrpSpPr>
@@ -3163,7 +3165,14 @@
         <p:cNvGrpSpPr/>
         <p:nvPr/>
       </p:nvGrpSpPr>
-      <p:grpSpPr/>
+      <p:grpSpPr>
+        <a:xfrm>
+          <a:off x="0" y="0"/>
+          <a:ext cx="0" cy="0"/>
+          <a:chOff x="0" y="0"/>
+          <a:chExt cx="0" cy="0"/>
+        </a:xfrm>
+      </p:grpSpPr>
       <p:sp>
         <p:nvSpPr>
           <p:cNvPr id="2" name="Title 1"/>
@@ -3219,7 +3228,9 @@
               <a:t>- Selecting optimal chunk size</a:t>
             </a:r>
           </a:p>
-          <a:p/>
+          <a:p>
+            <a:endParaRPr/>
+          </a:p>
           <a:p>
             <a:r>
               <a:t>Solutions:</a:t>
@@ -3246,7 +3257,7 @@
 </file>
 
 <file path=ppt/slides/slide11.xml><?xml version="1.0" encoding="utf-8"?>
-<p:sld xmlns:a="http://schemas.openxmlformats.org/drawingml/2006/main" xmlns:p="http://schemas.openxmlformats.org/presentationml/2006/main" xmlns:r="http://schemas.openxmlformats.org/officeDocument/2006/relationships">
+<p:sld xmlns:a="http://schemas.openxmlformats.org/drawingml/2006/main" xmlns:r="http://schemas.openxmlformats.org/officeDocument/2006/relationships" xmlns:p="http://schemas.openxmlformats.org/presentationml/2006/main">
   <p:cSld>
     <p:spTree>
       <p:nvGrpSpPr>
@@ -3254,7 +3265,14 @@
         <p:cNvGrpSpPr/>
         <p:nvPr/>
       </p:nvGrpSpPr>
-      <p:grpSpPr/>
+      <p:grpSpPr>
+        <a:xfrm>
+          <a:off x="0" y="0"/>
+          <a:ext cx="0" cy="0"/>
+          <a:chOff x="0" y="0"/>
+          <a:chExt cx="0" cy="0"/>
+        </a:xfrm>
+      </p:grpSpPr>
       <p:sp>
         <p:nvSpPr>
           <p:cNvPr id="2" name="Title 1"/>
@@ -3310,7 +3328,9 @@
               <a:t>- Optional Dockerfile</a:t>
             </a:r>
           </a:p>
-          <a:p/>
+          <a:p>
+            <a:endParaRPr/>
+          </a:p>
           <a:p>
             <a:r>
               <a:t>Setup:</a:t>
@@ -3337,7 +3357,7 @@
 </file>
 
 <file path=ppt/slides/slide12.xml><?xml version="1.0" encoding="utf-8"?>
-<p:sld xmlns:a="http://schemas.openxmlformats.org/drawingml/2006/main" xmlns:p="http://schemas.openxmlformats.org/presentationml/2006/main" xmlns:r="http://schemas.openxmlformats.org/officeDocument/2006/relationships">
+<p:sld xmlns:a="http://schemas.openxmlformats.org/drawingml/2006/main" xmlns:r="http://schemas.openxmlformats.org/officeDocument/2006/relationships" xmlns:p="http://schemas.openxmlformats.org/presentationml/2006/main">
   <p:cSld>
     <p:spTree>
       <p:nvGrpSpPr>
@@ -3345,7 +3365,14 @@
         <p:cNvGrpSpPr/>
         <p:nvPr/>
       </p:nvGrpSpPr>
-      <p:grpSpPr/>
+      <p:grpSpPr>
+        <a:xfrm>
+          <a:off x="0" y="0"/>
+          <a:ext cx="0" cy="0"/>
+          <a:chOff x="0" y="0"/>
+          <a:chExt cx="0" cy="0"/>
+        </a:xfrm>
+      </p:grpSpPr>
       <p:sp>
         <p:nvSpPr>
           <p:cNvPr id="2" name="Title 1"/>
@@ -3391,7 +3418,9 @@
               <a:t>- Queries successfully answered using retrieved context</a:t>
             </a:r>
           </a:p>
-          <a:p/>
+          <a:p>
+            <a:endParaRPr/>
+          </a:p>
           <a:p>
             <a:r>
               <a:t>Conclusion:</a:t>
@@ -3418,7 +3447,7 @@
 </file>
 
 <file path=ppt/slides/slide2.xml><?xml version="1.0" encoding="utf-8"?>
-<p:sld xmlns:a="http://schemas.openxmlformats.org/drawingml/2006/main" xmlns:p="http://schemas.openxmlformats.org/presentationml/2006/main" xmlns:r="http://schemas.openxmlformats.org/officeDocument/2006/relationships">
+<p:sld xmlns:a="http://schemas.openxmlformats.org/drawingml/2006/main" xmlns:r="http://schemas.openxmlformats.org/officeDocument/2006/relationships" xmlns:p="http://schemas.openxmlformats.org/presentationml/2006/main">
   <p:cSld>
     <p:spTree>
       <p:nvGrpSpPr>
@@ -3426,7 +3455,14 @@
         <p:cNvGrpSpPr/>
         <p:nvPr/>
       </p:nvGrpSpPr>
-      <p:grpSpPr/>
+      <p:grpSpPr>
+        <a:xfrm>
+          <a:off x="0" y="0"/>
+          <a:ext cx="0" cy="0"/>
+          <a:chOff x="0" y="0"/>
+          <a:chExt cx="0" cy="0"/>
+        </a:xfrm>
+      </p:grpSpPr>
       <p:sp>
         <p:nvSpPr>
           <p:cNvPr id="2" name="Title 1"/>
@@ -3467,7 +3503,9 @@
               <a:t>This project implements a minimal Retrieval-Augmented Generation (RAG) system.</a:t>
             </a:r>
           </a:p>
-          <a:p/>
+          <a:p>
+            <a:endParaRPr/>
+          </a:p>
           <a:p>
             <a:r>
               <a:t>- Combines retrieval + generative AI</a:t>
@@ -3483,7 +3521,9 @@
               <a:t>- Focuses on clarity and modular design</a:t>
             </a:r>
           </a:p>
-          <a:p/>
+          <a:p>
+            <a:endParaRPr/>
+          </a:p>
           <a:p>
             <a:r>
               <a:t>Goal: Answer user queries grounded in a dataset.</a:t>
@@ -3500,7 +3540,7 @@
 </file>
 
 <file path=ppt/slides/slide3.xml><?xml version="1.0" encoding="utf-8"?>
-<p:sld xmlns:a="http://schemas.openxmlformats.org/drawingml/2006/main" xmlns:p="http://schemas.openxmlformats.org/presentationml/2006/main" xmlns:r="http://schemas.openxmlformats.org/officeDocument/2006/relationships">
+<p:sld xmlns:a="http://schemas.openxmlformats.org/drawingml/2006/main" xmlns:r="http://schemas.openxmlformats.org/officeDocument/2006/relationships" xmlns:p="http://schemas.openxmlformats.org/presentationml/2006/main">
   <p:cSld>
     <p:spTree>
       <p:nvGrpSpPr>
@@ -3508,7 +3548,14 @@
         <p:cNvGrpSpPr/>
         <p:nvPr/>
       </p:nvGrpSpPr>
-      <p:grpSpPr/>
+      <p:grpSpPr>
+        <a:xfrm>
+          <a:off x="0" y="0"/>
+          <a:ext cx="0" cy="0"/>
+          <a:chOff x="0" y="0"/>
+          <a:chExt cx="0" cy="0"/>
+        </a:xfrm>
+      </p:grpSpPr>
       <p:sp>
         <p:nvSpPr>
           <p:cNvPr id="2" name="Title 1"/>
@@ -3554,7 +3601,9 @@
               <a:t>→ Prompt Augmentation → LLM → Final Answer</a:t>
             </a:r>
           </a:p>
-          <a:p/>
+          <a:p>
+            <a:endParaRPr/>
+          </a:p>
           <a:p>
             <a:r>
               <a:t>Components:</a:t>
@@ -3591,7 +3640,7 @@
 </file>
 
 <file path=ppt/slides/slide4.xml><?xml version="1.0" encoding="utf-8"?>
-<p:sld xmlns:a="http://schemas.openxmlformats.org/drawingml/2006/main" xmlns:p="http://schemas.openxmlformats.org/presentationml/2006/main" xmlns:r="http://schemas.openxmlformats.org/officeDocument/2006/relationships">
+<p:sld xmlns:a="http://schemas.openxmlformats.org/drawingml/2006/main" xmlns:r="http://schemas.openxmlformats.org/officeDocument/2006/relationships" xmlns:p="http://schemas.openxmlformats.org/presentationml/2006/main">
   <p:cSld>
     <p:spTree>
       <p:nvGrpSpPr>
@@ -3599,7 +3648,14 @@
         <p:cNvGrpSpPr/>
         <p:nvPr/>
       </p:nvGrpSpPr>
-      <p:grpSpPr/>
+      <p:grpSpPr>
+        <a:xfrm>
+          <a:off x="0" y="0"/>
+          <a:ext cx="0" cy="0"/>
+          <a:chOff x="0" y="0"/>
+          <a:chExt cx="0" cy="0"/>
+        </a:xfrm>
+      </p:grpSpPr>
       <p:sp>
         <p:nvSpPr>
           <p:cNvPr id="2" name="Title 1"/>
@@ -3650,7 +3706,9 @@
               <a:t>- Indexed for fast retrieval</a:t>
             </a:r>
           </a:p>
-          <a:p/>
+          <a:p>
+            <a:endParaRPr/>
+          </a:p>
           <a:p>
             <a:r>
               <a:t>Choice:</a:t>
@@ -3677,7 +3735,7 @@
 </file>
 
 <file path=ppt/slides/slide5.xml><?xml version="1.0" encoding="utf-8"?>
-<p:sld xmlns:a="http://schemas.openxmlformats.org/drawingml/2006/main" xmlns:p="http://schemas.openxmlformats.org/presentationml/2006/main" xmlns:r="http://schemas.openxmlformats.org/officeDocument/2006/relationships">
+<p:sld xmlns:a="http://schemas.openxmlformats.org/drawingml/2006/main" xmlns:r="http://schemas.openxmlformats.org/officeDocument/2006/relationships" xmlns:p="http://schemas.openxmlformats.org/presentationml/2006/main">
   <p:cSld>
     <p:spTree>
       <p:nvGrpSpPr>
@@ -3685,7 +3743,14 @@
         <p:cNvGrpSpPr/>
         <p:nvPr/>
       </p:nvGrpSpPr>
-      <p:grpSpPr/>
+      <p:grpSpPr>
+        <a:xfrm>
+          <a:off x="0" y="0"/>
+          <a:ext cx="0" cy="0"/>
+          <a:chOff x="0" y="0"/>
+          <a:chExt cx="0" cy="0"/>
+        </a:xfrm>
+      </p:grpSpPr>
       <p:sp>
         <p:nvSpPr>
           <p:cNvPr id="2" name="Title 1"/>
@@ -3731,7 +3796,9 @@
               <a:t>- Used for both documents and queries</a:t>
             </a:r>
           </a:p>
-          <a:p/>
+          <a:p>
+            <a:endParaRPr/>
+          </a:p>
           <a:p>
             <a:r>
               <a:t>Choice:</a:t>
@@ -3747,7 +3814,9 @@
               <a:t>- Runs locally on CPU</a:t>
             </a:r>
           </a:p>
-          <a:p/>
+          <a:p>
+            <a:endParaRPr/>
+          </a:p>
           <a:p>
             <a:r>
               <a:t>Benefit:</a:t>
@@ -3769,7 +3838,7 @@
 </file>
 
 <file path=ppt/slides/slide6.xml><?xml version="1.0" encoding="utf-8"?>
-<p:sld xmlns:a="http://schemas.openxmlformats.org/drawingml/2006/main" xmlns:p="http://schemas.openxmlformats.org/presentationml/2006/main" xmlns:r="http://schemas.openxmlformats.org/officeDocument/2006/relationships">
+<p:sld xmlns:a="http://schemas.openxmlformats.org/drawingml/2006/main" xmlns:r="http://schemas.openxmlformats.org/officeDocument/2006/relationships" xmlns:p="http://schemas.openxmlformats.org/presentationml/2006/main">
   <p:cSld>
     <p:spTree>
       <p:nvGrpSpPr>
@@ -3777,7 +3846,14 @@
         <p:cNvGrpSpPr/>
         <p:nvPr/>
       </p:nvGrpSpPr>
-      <p:grpSpPr/>
+      <p:grpSpPr>
+        <a:xfrm>
+          <a:off x="0" y="0"/>
+          <a:ext cx="0" cy="0"/>
+          <a:chOff x="0" y="0"/>
+          <a:chExt cx="0" cy="0"/>
+        </a:xfrm>
+      </p:grpSpPr>
       <p:sp>
         <p:nvSpPr>
           <p:cNvPr id="2" name="Title 1"/>
@@ -3823,7 +3899,9 @@
               <a:t>- Returns top-k relevant chunks</a:t>
             </a:r>
           </a:p>
-          <a:p/>
+          <a:p>
+            <a:endParaRPr/>
+          </a:p>
           <a:p>
             <a:r>
               <a:t>Approach:</a:t>
@@ -3834,7 +3912,9 @@
               <a:t>- Cosine similarity / vector distance</a:t>
             </a:r>
           </a:p>
-          <a:p/>
+          <a:p>
+            <a:endParaRPr/>
+          </a:p>
           <a:p>
             <a:r>
               <a:t>Goal:</a:t>
@@ -3856,7 +3936,7 @@
 </file>
 
 <file path=ppt/slides/slide7.xml><?xml version="1.0" encoding="utf-8"?>
-<p:sld xmlns:a="http://schemas.openxmlformats.org/drawingml/2006/main" xmlns:p="http://schemas.openxmlformats.org/presentationml/2006/main" xmlns:r="http://schemas.openxmlformats.org/officeDocument/2006/relationships">
+<p:sld xmlns:a="http://schemas.openxmlformats.org/drawingml/2006/main" xmlns:r="http://schemas.openxmlformats.org/officeDocument/2006/relationships" xmlns:p="http://schemas.openxmlformats.org/presentationml/2006/main">
   <p:cSld>
     <p:spTree>
       <p:nvGrpSpPr>
@@ -3864,7 +3944,14 @@
         <p:cNvGrpSpPr/>
         <p:nvPr/>
       </p:nvGrpSpPr>
-      <p:grpSpPr/>
+      <p:grpSpPr>
+        <a:xfrm>
+          <a:off x="0" y="0"/>
+          <a:ext cx="0" cy="0"/>
+          <a:chOff x="0" y="0"/>
+          <a:chExt cx="0" cy="0"/>
+        </a:xfrm>
+      </p:grpSpPr>
       <p:sp>
         <p:nvSpPr>
           <p:cNvPr id="2" name="Title 1"/>
@@ -3910,7 +3997,9 @@
               <a:t>- Forms structured prompt</a:t>
             </a:r>
           </a:p>
-          <a:p/>
+          <a:p>
+            <a:endParaRPr/>
+          </a:p>
           <a:p>
             <a:r>
               <a:t>Example:</a:t>
@@ -3926,7 +4015,9 @@
               <a:t>Question: [user query]</a:t>
             </a:r>
           </a:p>
-          <a:p/>
+          <a:p>
+            <a:endParaRPr/>
+          </a:p>
           <a:p>
             <a:r>
               <a:t>Purpose:</a:t>
@@ -3948,7 +4039,7 @@
 </file>
 
 <file path=ppt/slides/slide8.xml><?xml version="1.0" encoding="utf-8"?>
-<p:sld xmlns:a="http://schemas.openxmlformats.org/drawingml/2006/main" xmlns:p="http://schemas.openxmlformats.org/presentationml/2006/main" xmlns:r="http://schemas.openxmlformats.org/officeDocument/2006/relationships">
+<p:sld xmlns:a="http://schemas.openxmlformats.org/drawingml/2006/main" xmlns:r="http://schemas.openxmlformats.org/officeDocument/2006/relationships" xmlns:p="http://schemas.openxmlformats.org/presentationml/2006/main">
   <p:cSld>
     <p:spTree>
       <p:nvGrpSpPr>
@@ -3956,7 +4047,14 @@
         <p:cNvGrpSpPr/>
         <p:nvPr/>
       </p:nvGrpSpPr>
-      <p:grpSpPr/>
+      <p:grpSpPr>
+        <a:xfrm>
+          <a:off x="0" y="0"/>
+          <a:ext cx="0" cy="0"/>
+          <a:chOff x="0" y="0"/>
+          <a:chExt cx="0" cy="0"/>
+        </a:xfrm>
+      </p:grpSpPr>
       <p:sp>
         <p:nvSpPr>
           <p:cNvPr id="2" name="Title 1"/>
@@ -3997,7 +4095,9 @@
               <a:t>- Uses LLM to generate final answer</a:t>
             </a:r>
           </a:p>
-          <a:p/>
+          <a:p>
+            <a:endParaRPr/>
+          </a:p>
           <a:p>
             <a:r>
               <a:t>Choice:</a:t>
@@ -4008,7 +4108,9 @@
               <a:t>- Lightweight model (e.g., small local LLM)</a:t>
             </a:r>
           </a:p>
-          <a:p/>
+          <a:p>
+            <a:endParaRPr/>
+          </a:p>
           <a:p>
             <a:r>
               <a:t>Key Goal:</a:t>
@@ -4030,7 +4132,7 @@
 </file>
 
 <file path=ppt/slides/slide9.xml><?xml version="1.0" encoding="utf-8"?>
-<p:sld xmlns:a="http://schemas.openxmlformats.org/drawingml/2006/main" xmlns:p="http://schemas.openxmlformats.org/presentationml/2006/main" xmlns:r="http://schemas.openxmlformats.org/officeDocument/2006/relationships">
+<p:sld xmlns:a="http://schemas.openxmlformats.org/drawingml/2006/main" xmlns:r="http://schemas.openxmlformats.org/officeDocument/2006/relationships" xmlns:p="http://schemas.openxmlformats.org/presentationml/2006/main">
   <p:cSld>
     <p:spTree>
       <p:nvGrpSpPr>
@@ -4038,7 +4140,14 @@
         <p:cNvGrpSpPr/>
         <p:nvPr/>
       </p:nvGrpSpPr>
-      <p:grpSpPr/>
+      <p:grpSpPr>
+        <a:xfrm>
+          <a:off x="0" y="0"/>
+          <a:ext cx="0" cy="0"/>
+          <a:chOff x="0" y="0"/>
+          <a:chExt cx="0" cy="0"/>
+        </a:xfrm>
+      </p:grpSpPr>
       <p:sp>
         <p:nvSpPr>
           <p:cNvPr id="2" name="Title 1"/>
